--- a/assets/figures-editable/c3-c4/c3-e01.pptx
+++ b/assets/figures-editable/c3-c4/c3-e01.pptx
@@ -3104,8 +3104,8 @@
         </p:nvSpPr>
         <p:spPr>
           <a:xfrm>
-            <a:off x="274320" y="137160"/>
-            <a:ext cx="11612880" cy="365760"/>
+            <a:off x="274320" y="118872"/>
+            <a:ext cx="11612880" cy="340105"/>
           </a:xfrm>
           <a:prstGeom prst="rect">
             <a:avLst/>
@@ -3114,7 +3114,7 @@
           <a:effectLst/>
         </p:spPr>
         <p:txBody>
-          <a:bodyPr wrap="square" lIns="27432" rIns="27432" tIns="18288" bIns="18288" anchor="ctr">
+          <a:bodyPr wrap="none" lIns="18288" rIns="18288" tIns="18288" bIns="18288" anchor="t">
             <a:spAutoFit/>
           </a:bodyPr>
           <a:lstStyle/>
@@ -3125,7 +3125,7 @@
               </a:spcAft>
             </a:pPr>
             <a:r>
-              <a:rPr sz="2100" b="0" i="0">
+              <a:rPr sz="1900" b="1" i="0">
                 <a:solidFill>
                   <a:srgbClr val="8EDBD4"/>
                 </a:solidFill>
@@ -3136,21 +3136,20 @@
           </a:p>
         </p:txBody>
       </p:sp>
-      <p:sp>
-        <p:nvSpPr>
-          <p:cNvPr id="3" name="C3-E01 ellipse 1" descr="sci-ppt:o001"/>
-          <p:cNvSpPr/>
-          <p:nvPr/>
-        </p:nvSpPr>
-        <p:spPr>
-          <a:xfrm>
-            <a:off x="1005840" y="1188720"/>
-            <a:ext cx="365760" cy="365760"/>
-          </a:xfrm>
-          <a:prstGeom prst="ellipse">
-            <a:avLst/>
-          </a:prstGeom>
-          <a:noFill/>
+      <p:cxnSp>
+        <p:nvCxnSpPr>
+          <p:cNvPr id="3" name="C3-E01 line 1" descr="sci-ppt:o001"/>
+          <p:cNvCxnSpPr/>
+          <p:nvPr/>
+        </p:nvCxnSpPr>
+        <p:spPr>
+          <a:xfrm>
+            <a:off x="914400" y="5029200"/>
+            <a:ext cx="6035040" cy="0"/>
+          </a:xfrm>
+          <a:prstGeom prst="line">
+            <a:avLst/>
+          </a:prstGeom>
           <a:ln w="19050">
             <a:solidFill>
               <a:srgbClr val="B4C7D2"/>
@@ -3158,31 +3157,21 @@
           </a:ln>
           <a:effectLst/>
         </p:spPr>
-        <p:txBody>
-          <a:bodyPr rtlCol="0" anchor="ctr"/>
-          <a:lstStyle/>
-          <a:p>
-            <a:pPr algn="ctr"/>
-          </a:p>
-        </p:txBody>
-      </p:sp>
-      <p:sp>
-        <p:nvSpPr>
-          <p:cNvPr id="4" name="C3-E01 ellipse 2" descr="sci-ppt:o002"/>
-          <p:cNvSpPr/>
-          <p:nvPr/>
-        </p:nvSpPr>
-        <p:spPr>
-          <a:xfrm>
-            <a:off x="1627632" y="1188720"/>
-            <a:ext cx="365760" cy="365760"/>
-          </a:xfrm>
-          <a:prstGeom prst="ellipse">
-            <a:avLst/>
-          </a:prstGeom>
-          <a:solidFill>
-            <a:srgbClr val="213E4B"/>
-          </a:solidFill>
+      </p:cxnSp>
+      <p:cxnSp>
+        <p:nvCxnSpPr>
+          <p:cNvPr id="4" name="C3-E01 line 2" descr="sci-ppt:o002"/>
+          <p:cNvCxnSpPr/>
+          <p:nvPr/>
+        </p:nvCxnSpPr>
+        <p:spPr>
+          <a:xfrm>
+            <a:off x="914400" y="1371600"/>
+            <a:ext cx="0" cy="3657600"/>
+          </a:xfrm>
+          <a:prstGeom prst="line">
+            <a:avLst/>
+          </a:prstGeom>
           <a:ln w="19050">
             <a:solidFill>
               <a:srgbClr val="B4C7D2"/>
@@ -3190,434 +3179,773 @@
           </a:ln>
           <a:effectLst/>
         </p:spPr>
-        <p:txBody>
-          <a:bodyPr rtlCol="0" anchor="ctr"/>
-          <a:lstStyle/>
-          <a:p>
-            <a:pPr algn="ctr"/>
-          </a:p>
-        </p:txBody>
-      </p:sp>
-      <p:sp>
-        <p:nvSpPr>
-          <p:cNvPr id="5" name="C3-E01 ellipse 3" descr="sci-ppt:o003"/>
-          <p:cNvSpPr/>
-          <p:nvPr/>
-        </p:nvSpPr>
-        <p:spPr>
-          <a:xfrm>
-            <a:off x="2249424" y="1188720"/>
-            <a:ext cx="365760" cy="365760"/>
-          </a:xfrm>
-          <a:prstGeom prst="ellipse">
-            <a:avLst/>
-          </a:prstGeom>
-          <a:solidFill>
-            <a:srgbClr val="213E4B"/>
-          </a:solidFill>
-          <a:ln w="19050">
+      </p:cxnSp>
+      <p:cxnSp>
+        <p:nvCxnSpPr>
+          <p:cNvPr id="5" name="C3-E01 line 3" descr="sci-ppt:o003"/>
+          <p:cNvCxnSpPr/>
+          <p:nvPr/>
+        </p:nvCxnSpPr>
+        <p:spPr>
+          <a:xfrm>
+            <a:off x="1137919" y="5029200"/>
+            <a:ext cx="0" cy="64008"/>
+          </a:xfrm>
+          <a:prstGeom prst="line">
+            <a:avLst/>
+          </a:prstGeom>
+          <a:ln w="12700">
             <a:solidFill>
               <a:srgbClr val="B4C7D2"/>
             </a:solidFill>
           </a:ln>
           <a:effectLst/>
         </p:spPr>
-        <p:txBody>
-          <a:bodyPr rtlCol="0" anchor="ctr"/>
-          <a:lstStyle/>
-          <a:p>
-            <a:pPr algn="ctr"/>
-          </a:p>
-        </p:txBody>
-      </p:sp>
-      <p:sp>
-        <p:nvSpPr>
-          <p:cNvPr id="6" name="C3-E01 ellipse 4" descr="sci-ppt:o004"/>
-          <p:cNvSpPr/>
-          <p:nvPr/>
-        </p:nvSpPr>
-        <p:spPr>
-          <a:xfrm>
-            <a:off x="2871215" y="1188720"/>
-            <a:ext cx="365760" cy="365760"/>
-          </a:xfrm>
-          <a:prstGeom prst="ellipse">
-            <a:avLst/>
-          </a:prstGeom>
-          <a:solidFill>
-            <a:srgbClr val="213E4B"/>
-          </a:solidFill>
-          <a:ln w="19050">
+      </p:cxnSp>
+      <p:cxnSp>
+        <p:nvCxnSpPr>
+          <p:cNvPr id="6" name="C3-E01 line 4" descr="sci-ppt:o004"/>
+          <p:cNvCxnSpPr/>
+          <p:nvPr/>
+        </p:nvCxnSpPr>
+        <p:spPr>
+          <a:xfrm>
+            <a:off x="1137919" y="1371600"/>
+            <a:ext cx="0" cy="3657600"/>
+          </a:xfrm>
+          <a:prstGeom prst="line">
+            <a:avLst/>
+          </a:prstGeom>
+          <a:ln w="7620">
+            <a:solidFill>
+              <a:srgbClr val="2E4756"/>
+            </a:solidFill>
+          </a:ln>
+          <a:effectLst/>
+        </p:spPr>
+      </p:cxnSp>
+      <p:sp>
+        <p:nvSpPr>
+          <p:cNvPr id="7" name="C3-E01 text 5" descr="sci-ppt:o005"/>
+          <p:cNvSpPr txBox="1"/>
+          <p:nvPr/>
+        </p:nvSpPr>
+        <p:spPr>
+          <a:xfrm>
+            <a:off x="680719" y="5111496"/>
+            <a:ext cx="914400" cy="208407"/>
+          </a:xfrm>
+          <a:prstGeom prst="rect">
+            <a:avLst/>
+          </a:prstGeom>
+          <a:noFill/>
+          <a:effectLst/>
+        </p:spPr>
+        <p:txBody>
+          <a:bodyPr wrap="none" lIns="18288" rIns="18288" tIns="18288" bIns="18288" anchor="t">
+            <a:spAutoFit/>
+          </a:bodyPr>
+          <a:lstStyle/>
+          <a:p>
+            <a:pPr algn="ctr">
+              <a:spcAft>
+                <a:spcPts val="0"/>
+              </a:spcAft>
+            </a:pPr>
+            <a:r>
+              <a:rPr sz="1050" b="0" i="0">
+                <a:solidFill>
+                  <a:srgbClr val="B4C7D2"/>
+                </a:solidFill>
+                <a:latin typeface="Arial"/>
+              </a:rPr>
+              <a:t>10</a:t>
+            </a:r>
+          </a:p>
+        </p:txBody>
+      </p:sp>
+      <p:cxnSp>
+        <p:nvCxnSpPr>
+          <p:cNvPr id="8" name="C3-E01 line 6" descr="sci-ppt:o006"/>
+          <p:cNvCxnSpPr/>
+          <p:nvPr/>
+        </p:nvCxnSpPr>
+        <p:spPr>
+          <a:xfrm>
+            <a:off x="3000586" y="5029200"/>
+            <a:ext cx="0" cy="64008"/>
+          </a:xfrm>
+          <a:prstGeom prst="line">
+            <a:avLst/>
+          </a:prstGeom>
+          <a:ln w="12700">
             <a:solidFill>
               <a:srgbClr val="B4C7D2"/>
             </a:solidFill>
           </a:ln>
           <a:effectLst/>
         </p:spPr>
-        <p:txBody>
-          <a:bodyPr rtlCol="0" anchor="ctr"/>
-          <a:lstStyle/>
-          <a:p>
-            <a:pPr algn="ctr"/>
-          </a:p>
-        </p:txBody>
-      </p:sp>
-      <p:sp>
-        <p:nvSpPr>
-          <p:cNvPr id="7" name="C3-E01 ellipse 5" descr="sci-ppt:o005"/>
-          <p:cNvSpPr/>
-          <p:nvPr/>
-        </p:nvSpPr>
-        <p:spPr>
-          <a:xfrm>
-            <a:off x="3493008" y="1188720"/>
-            <a:ext cx="365760" cy="365760"/>
-          </a:xfrm>
-          <a:prstGeom prst="ellipse">
+      </p:cxnSp>
+      <p:cxnSp>
+        <p:nvCxnSpPr>
+          <p:cNvPr id="9" name="C3-E01 line 7" descr="sci-ppt:o007"/>
+          <p:cNvCxnSpPr/>
+          <p:nvPr/>
+        </p:nvCxnSpPr>
+        <p:spPr>
+          <a:xfrm>
+            <a:off x="3000586" y="1371600"/>
+            <a:ext cx="0" cy="3657600"/>
+          </a:xfrm>
+          <a:prstGeom prst="line">
+            <a:avLst/>
+          </a:prstGeom>
+          <a:ln w="7620">
+            <a:solidFill>
+              <a:srgbClr val="2E4756"/>
+            </a:solidFill>
+          </a:ln>
+          <a:effectLst/>
+        </p:spPr>
+      </p:cxnSp>
+      <p:sp>
+        <p:nvSpPr>
+          <p:cNvPr id="10" name="C3-E01 text 8" descr="sci-ppt:o008"/>
+          <p:cNvSpPr txBox="1"/>
+          <p:nvPr/>
+        </p:nvSpPr>
+        <p:spPr>
+          <a:xfrm>
+            <a:off x="2543386" y="5111496"/>
+            <a:ext cx="914400" cy="208407"/>
+          </a:xfrm>
+          <a:prstGeom prst="rect">
             <a:avLst/>
           </a:prstGeom>
           <a:noFill/>
-          <a:ln w="19050">
+          <a:effectLst/>
+        </p:spPr>
+        <p:txBody>
+          <a:bodyPr wrap="none" lIns="18288" rIns="18288" tIns="18288" bIns="18288" anchor="t">
+            <a:spAutoFit/>
+          </a:bodyPr>
+          <a:lstStyle/>
+          <a:p>
+            <a:pPr algn="ctr">
+              <a:spcAft>
+                <a:spcPts val="0"/>
+              </a:spcAft>
+            </a:pPr>
+            <a:r>
+              <a:rPr sz="1050" b="0" i="0">
+                <a:solidFill>
+                  <a:srgbClr val="B4C7D2"/>
+                </a:solidFill>
+                <a:latin typeface="Arial"/>
+              </a:rPr>
+              <a:t>15</a:t>
+            </a:r>
+          </a:p>
+        </p:txBody>
+      </p:sp>
+      <p:cxnSp>
+        <p:nvCxnSpPr>
+          <p:cNvPr id="11" name="C3-E01 line 9" descr="sci-ppt:o009"/>
+          <p:cNvCxnSpPr/>
+          <p:nvPr/>
+        </p:nvCxnSpPr>
+        <p:spPr>
+          <a:xfrm>
+            <a:off x="4863253" y="5029200"/>
+            <a:ext cx="0" cy="64008"/>
+          </a:xfrm>
+          <a:prstGeom prst="line">
+            <a:avLst/>
+          </a:prstGeom>
+          <a:ln w="12700">
             <a:solidFill>
               <a:srgbClr val="B4C7D2"/>
             </a:solidFill>
           </a:ln>
           <a:effectLst/>
         </p:spPr>
-        <p:txBody>
-          <a:bodyPr rtlCol="0" anchor="ctr"/>
-          <a:lstStyle/>
-          <a:p>
-            <a:pPr algn="ctr"/>
-          </a:p>
-        </p:txBody>
-      </p:sp>
-      <p:sp>
-        <p:nvSpPr>
-          <p:cNvPr id="8" name="C3-E01 ellipse 6" descr="sci-ppt:o006"/>
-          <p:cNvSpPr/>
-          <p:nvPr/>
-        </p:nvSpPr>
-        <p:spPr>
-          <a:xfrm>
-            <a:off x="1005840" y="1828800"/>
-            <a:ext cx="365760" cy="365760"/>
-          </a:xfrm>
-          <a:prstGeom prst="ellipse">
-            <a:avLst/>
-          </a:prstGeom>
-          <a:solidFill>
-            <a:srgbClr val="213E4B"/>
-          </a:solidFill>
-          <a:ln w="19050">
+      </p:cxnSp>
+      <p:cxnSp>
+        <p:nvCxnSpPr>
+          <p:cNvPr id="12" name="C3-E01 line 10" descr="sci-ppt:o010"/>
+          <p:cNvCxnSpPr/>
+          <p:nvPr/>
+        </p:nvCxnSpPr>
+        <p:spPr>
+          <a:xfrm>
+            <a:off x="4863253" y="1371600"/>
+            <a:ext cx="0" cy="3657600"/>
+          </a:xfrm>
+          <a:prstGeom prst="line">
+            <a:avLst/>
+          </a:prstGeom>
+          <a:ln w="7620">
+            <a:solidFill>
+              <a:srgbClr val="2E4756"/>
+            </a:solidFill>
+          </a:ln>
+          <a:effectLst/>
+        </p:spPr>
+      </p:cxnSp>
+      <p:sp>
+        <p:nvSpPr>
+          <p:cNvPr id="13" name="C3-E01 text 11" descr="sci-ppt:o011"/>
+          <p:cNvSpPr txBox="1"/>
+          <p:nvPr/>
+        </p:nvSpPr>
+        <p:spPr>
+          <a:xfrm>
+            <a:off x="4406053" y="5111496"/>
+            <a:ext cx="914400" cy="208407"/>
+          </a:xfrm>
+          <a:prstGeom prst="rect">
+            <a:avLst/>
+          </a:prstGeom>
+          <a:noFill/>
+          <a:effectLst/>
+        </p:spPr>
+        <p:txBody>
+          <a:bodyPr wrap="none" lIns="18288" rIns="18288" tIns="18288" bIns="18288" anchor="t">
+            <a:spAutoFit/>
+          </a:bodyPr>
+          <a:lstStyle/>
+          <a:p>
+            <a:pPr algn="ctr">
+              <a:spcAft>
+                <a:spcPts val="0"/>
+              </a:spcAft>
+            </a:pPr>
+            <a:r>
+              <a:rPr sz="1050" b="0" i="0">
+                <a:solidFill>
+                  <a:srgbClr val="B4C7D2"/>
+                </a:solidFill>
+                <a:latin typeface="Arial"/>
+              </a:rPr>
+              <a:t>20</a:t>
+            </a:r>
+          </a:p>
+        </p:txBody>
+      </p:sp>
+      <p:cxnSp>
+        <p:nvCxnSpPr>
+          <p:cNvPr id="14" name="C3-E01 line 12" descr="sci-ppt:o012"/>
+          <p:cNvCxnSpPr/>
+          <p:nvPr/>
+        </p:nvCxnSpPr>
+        <p:spPr>
+          <a:xfrm>
+            <a:off x="6725919" y="5029200"/>
+            <a:ext cx="0" cy="64008"/>
+          </a:xfrm>
+          <a:prstGeom prst="line">
+            <a:avLst/>
+          </a:prstGeom>
+          <a:ln w="12700">
             <a:solidFill>
               <a:srgbClr val="B4C7D2"/>
             </a:solidFill>
           </a:ln>
           <a:effectLst/>
         </p:spPr>
-        <p:txBody>
-          <a:bodyPr rtlCol="0" anchor="ctr"/>
-          <a:lstStyle/>
-          <a:p>
-            <a:pPr algn="ctr"/>
-          </a:p>
-        </p:txBody>
-      </p:sp>
-      <p:sp>
-        <p:nvSpPr>
-          <p:cNvPr id="9" name="C3-E01 ellipse 7" descr="sci-ppt:o007"/>
-          <p:cNvSpPr/>
-          <p:nvPr/>
-        </p:nvSpPr>
-        <p:spPr>
-          <a:xfrm>
-            <a:off x="1627632" y="1828800"/>
-            <a:ext cx="365760" cy="365760"/>
-          </a:xfrm>
-          <a:prstGeom prst="ellipse">
-            <a:avLst/>
-          </a:prstGeom>
-          <a:solidFill>
-            <a:srgbClr val="213E4B"/>
-          </a:solidFill>
-          <a:ln w="19050">
+      </p:cxnSp>
+      <p:cxnSp>
+        <p:nvCxnSpPr>
+          <p:cNvPr id="15" name="C3-E01 line 13" descr="sci-ppt:o013"/>
+          <p:cNvCxnSpPr/>
+          <p:nvPr/>
+        </p:nvCxnSpPr>
+        <p:spPr>
+          <a:xfrm>
+            <a:off x="6725919" y="1371600"/>
+            <a:ext cx="0" cy="3657600"/>
+          </a:xfrm>
+          <a:prstGeom prst="line">
+            <a:avLst/>
+          </a:prstGeom>
+          <a:ln w="7620">
+            <a:solidFill>
+              <a:srgbClr val="2E4756"/>
+            </a:solidFill>
+          </a:ln>
+          <a:effectLst/>
+        </p:spPr>
+      </p:cxnSp>
+      <p:sp>
+        <p:nvSpPr>
+          <p:cNvPr id="16" name="C3-E01 text 14" descr="sci-ppt:o014"/>
+          <p:cNvSpPr txBox="1"/>
+          <p:nvPr/>
+        </p:nvSpPr>
+        <p:spPr>
+          <a:xfrm>
+            <a:off x="6268719" y="5111496"/>
+            <a:ext cx="914400" cy="208407"/>
+          </a:xfrm>
+          <a:prstGeom prst="rect">
+            <a:avLst/>
+          </a:prstGeom>
+          <a:noFill/>
+          <a:effectLst/>
+        </p:spPr>
+        <p:txBody>
+          <a:bodyPr wrap="none" lIns="18288" rIns="18288" tIns="18288" bIns="18288" anchor="t">
+            <a:spAutoFit/>
+          </a:bodyPr>
+          <a:lstStyle/>
+          <a:p>
+            <a:pPr algn="ctr">
+              <a:spcAft>
+                <a:spcPts val="0"/>
+              </a:spcAft>
+            </a:pPr>
+            <a:r>
+              <a:rPr sz="1050" b="0" i="0">
+                <a:solidFill>
+                  <a:srgbClr val="B4C7D2"/>
+                </a:solidFill>
+                <a:latin typeface="Arial"/>
+              </a:rPr>
+              <a:t>25</a:t>
+            </a:r>
+          </a:p>
+        </p:txBody>
+      </p:sp>
+      <p:cxnSp>
+        <p:nvCxnSpPr>
+          <p:cNvPr id="17" name="C3-E01 line 15" descr="sci-ppt:o015"/>
+          <p:cNvCxnSpPr/>
+          <p:nvPr/>
+        </p:nvCxnSpPr>
+        <p:spPr>
+          <a:xfrm>
+            <a:off x="850392" y="5029200"/>
+            <a:ext cx="64008" cy="0"/>
+          </a:xfrm>
+          <a:prstGeom prst="line">
+            <a:avLst/>
+          </a:prstGeom>
+          <a:ln w="12700">
             <a:solidFill>
               <a:srgbClr val="B4C7D2"/>
             </a:solidFill>
           </a:ln>
           <a:effectLst/>
         </p:spPr>
-        <p:txBody>
-          <a:bodyPr rtlCol="0" anchor="ctr"/>
-          <a:lstStyle/>
-          <a:p>
-            <a:pPr algn="ctr"/>
-          </a:p>
-        </p:txBody>
-      </p:sp>
-      <p:sp>
-        <p:nvSpPr>
-          <p:cNvPr id="10" name="C3-E01 ellipse 8" descr="sci-ppt:o008"/>
-          <p:cNvSpPr/>
-          <p:nvPr/>
-        </p:nvSpPr>
-        <p:spPr>
-          <a:xfrm>
-            <a:off x="2249424" y="1828800"/>
-            <a:ext cx="365760" cy="365760"/>
-          </a:xfrm>
-          <a:prstGeom prst="ellipse">
-            <a:avLst/>
-          </a:prstGeom>
-          <a:solidFill>
-            <a:srgbClr val="213E4B"/>
-          </a:solidFill>
-          <a:ln w="19050">
+      </p:cxnSp>
+      <p:cxnSp>
+        <p:nvCxnSpPr>
+          <p:cNvPr id="18" name="C3-E01 line 16" descr="sci-ppt:o016"/>
+          <p:cNvCxnSpPr/>
+          <p:nvPr/>
+        </p:nvCxnSpPr>
+        <p:spPr>
+          <a:xfrm>
+            <a:off x="914400" y="5029200"/>
+            <a:ext cx="6035040" cy="0"/>
+          </a:xfrm>
+          <a:prstGeom prst="line">
+            <a:avLst/>
+          </a:prstGeom>
+          <a:ln w="7620">
+            <a:solidFill>
+              <a:srgbClr val="2E4756"/>
+            </a:solidFill>
+          </a:ln>
+          <a:effectLst/>
+        </p:spPr>
+      </p:cxnSp>
+      <p:sp>
+        <p:nvSpPr>
+          <p:cNvPr id="19" name="C3-E01 text 17" descr="sci-ppt:o017"/>
+          <p:cNvSpPr txBox="1"/>
+          <p:nvPr/>
+        </p:nvSpPr>
+        <p:spPr>
+          <a:xfrm>
+            <a:off x="45720" y="4946904"/>
+            <a:ext cx="777240" cy="208407"/>
+          </a:xfrm>
+          <a:prstGeom prst="rect">
+            <a:avLst/>
+          </a:prstGeom>
+          <a:noFill/>
+          <a:effectLst/>
+        </p:spPr>
+        <p:txBody>
+          <a:bodyPr wrap="none" lIns="18288" rIns="18288" tIns="18288" bIns="18288" anchor="t">
+            <a:spAutoFit/>
+          </a:bodyPr>
+          <a:lstStyle/>
+          <a:p>
+            <a:pPr algn="r">
+              <a:spcAft>
+                <a:spcPts val="0"/>
+              </a:spcAft>
+            </a:pPr>
+            <a:r>
+              <a:rPr sz="1050" b="0" i="0">
+                <a:solidFill>
+                  <a:srgbClr val="B4C7D2"/>
+                </a:solidFill>
+                <a:latin typeface="Arial"/>
+              </a:rPr>
+              <a:t>0.0</a:t>
+            </a:r>
+          </a:p>
+        </p:txBody>
+      </p:sp>
+      <p:cxnSp>
+        <p:nvCxnSpPr>
+          <p:cNvPr id="20" name="C3-E01 line 18" descr="sci-ppt:o018"/>
+          <p:cNvCxnSpPr/>
+          <p:nvPr/>
+        </p:nvCxnSpPr>
+        <p:spPr>
+          <a:xfrm>
+            <a:off x="850392" y="4158342"/>
+            <a:ext cx="64008" cy="0"/>
+          </a:xfrm>
+          <a:prstGeom prst="line">
+            <a:avLst/>
+          </a:prstGeom>
+          <a:ln w="12700">
             <a:solidFill>
               <a:srgbClr val="B4C7D2"/>
             </a:solidFill>
           </a:ln>
           <a:effectLst/>
         </p:spPr>
-        <p:txBody>
-          <a:bodyPr rtlCol="0" anchor="ctr"/>
-          <a:lstStyle/>
-          <a:p>
-            <a:pPr algn="ctr"/>
-          </a:p>
-        </p:txBody>
-      </p:sp>
-      <p:sp>
-        <p:nvSpPr>
-          <p:cNvPr id="11" name="C3-E01 ellipse 9" descr="sci-ppt:o009"/>
-          <p:cNvSpPr/>
-          <p:nvPr/>
-        </p:nvSpPr>
-        <p:spPr>
-          <a:xfrm>
-            <a:off x="2871215" y="1828800"/>
-            <a:ext cx="365760" cy="365760"/>
-          </a:xfrm>
-          <a:prstGeom prst="ellipse">
+      </p:cxnSp>
+      <p:cxnSp>
+        <p:nvCxnSpPr>
+          <p:cNvPr id="21" name="C3-E01 line 19" descr="sci-ppt:o019"/>
+          <p:cNvCxnSpPr/>
+          <p:nvPr/>
+        </p:nvCxnSpPr>
+        <p:spPr>
+          <a:xfrm>
+            <a:off x="914400" y="4158342"/>
+            <a:ext cx="6035040" cy="0"/>
+          </a:xfrm>
+          <a:prstGeom prst="line">
+            <a:avLst/>
+          </a:prstGeom>
+          <a:ln w="7620">
+            <a:solidFill>
+              <a:srgbClr val="2E4756"/>
+            </a:solidFill>
+          </a:ln>
+          <a:effectLst/>
+        </p:spPr>
+      </p:cxnSp>
+      <p:sp>
+        <p:nvSpPr>
+          <p:cNvPr id="22" name="C3-E01 text 20" descr="sci-ppt:o020"/>
+          <p:cNvSpPr txBox="1"/>
+          <p:nvPr/>
+        </p:nvSpPr>
+        <p:spPr>
+          <a:xfrm>
+            <a:off x="45720" y="4076046"/>
+            <a:ext cx="777240" cy="208407"/>
+          </a:xfrm>
+          <a:prstGeom prst="rect">
             <a:avLst/>
           </a:prstGeom>
           <a:noFill/>
-          <a:ln w="19050">
+          <a:effectLst/>
+        </p:spPr>
+        <p:txBody>
+          <a:bodyPr wrap="none" lIns="18288" rIns="18288" tIns="18288" bIns="18288" anchor="t">
+            <a:spAutoFit/>
+          </a:bodyPr>
+          <a:lstStyle/>
+          <a:p>
+            <a:pPr algn="r">
+              <a:spcAft>
+                <a:spcPts val="0"/>
+              </a:spcAft>
+            </a:pPr>
+            <a:r>
+              <a:rPr sz="1050" b="0" i="0">
+                <a:solidFill>
+                  <a:srgbClr val="B4C7D2"/>
+                </a:solidFill>
+                <a:latin typeface="Arial"/>
+              </a:rPr>
+              <a:t>0.1</a:t>
+            </a:r>
+          </a:p>
+        </p:txBody>
+      </p:sp>
+      <p:cxnSp>
+        <p:nvCxnSpPr>
+          <p:cNvPr id="23" name="C3-E01 line 21" descr="sci-ppt:o021"/>
+          <p:cNvCxnSpPr/>
+          <p:nvPr/>
+        </p:nvCxnSpPr>
+        <p:spPr>
+          <a:xfrm>
+            <a:off x="850392" y="3287485"/>
+            <a:ext cx="64008" cy="0"/>
+          </a:xfrm>
+          <a:prstGeom prst="line">
+            <a:avLst/>
+          </a:prstGeom>
+          <a:ln w="12700">
             <a:solidFill>
               <a:srgbClr val="B4C7D2"/>
             </a:solidFill>
           </a:ln>
           <a:effectLst/>
         </p:spPr>
-        <p:txBody>
-          <a:bodyPr rtlCol="0" anchor="ctr"/>
-          <a:lstStyle/>
-          <a:p>
-            <a:pPr algn="ctr"/>
-          </a:p>
-        </p:txBody>
-      </p:sp>
-      <p:sp>
-        <p:nvSpPr>
-          <p:cNvPr id="12" name="C3-E01 ellipse 10" descr="sci-ppt:o010"/>
-          <p:cNvSpPr/>
-          <p:nvPr/>
-        </p:nvSpPr>
-        <p:spPr>
-          <a:xfrm>
-            <a:off x="3493008" y="1828800"/>
-            <a:ext cx="365760" cy="365760"/>
-          </a:xfrm>
-          <a:prstGeom prst="ellipse">
-            <a:avLst/>
-          </a:prstGeom>
-          <a:solidFill>
-            <a:srgbClr val="213E4B"/>
-          </a:solidFill>
-          <a:ln w="19050">
+      </p:cxnSp>
+      <p:cxnSp>
+        <p:nvCxnSpPr>
+          <p:cNvPr id="24" name="C3-E01 line 22" descr="sci-ppt:o022"/>
+          <p:cNvCxnSpPr/>
+          <p:nvPr/>
+        </p:nvCxnSpPr>
+        <p:spPr>
+          <a:xfrm>
+            <a:off x="914400" y="3287485"/>
+            <a:ext cx="6035040" cy="0"/>
+          </a:xfrm>
+          <a:prstGeom prst="line">
+            <a:avLst/>
+          </a:prstGeom>
+          <a:ln w="7620">
+            <a:solidFill>
+              <a:srgbClr val="2E4756"/>
+            </a:solidFill>
+          </a:ln>
+          <a:effectLst/>
+        </p:spPr>
+      </p:cxnSp>
+      <p:sp>
+        <p:nvSpPr>
+          <p:cNvPr id="25" name="C3-E01 text 23" descr="sci-ppt:o023"/>
+          <p:cNvSpPr txBox="1"/>
+          <p:nvPr/>
+        </p:nvSpPr>
+        <p:spPr>
+          <a:xfrm>
+            <a:off x="45720" y="3205189"/>
+            <a:ext cx="777240" cy="208407"/>
+          </a:xfrm>
+          <a:prstGeom prst="rect">
+            <a:avLst/>
+          </a:prstGeom>
+          <a:noFill/>
+          <a:effectLst/>
+        </p:spPr>
+        <p:txBody>
+          <a:bodyPr wrap="none" lIns="18288" rIns="18288" tIns="18288" bIns="18288" anchor="t">
+            <a:spAutoFit/>
+          </a:bodyPr>
+          <a:lstStyle/>
+          <a:p>
+            <a:pPr algn="r">
+              <a:spcAft>
+                <a:spcPts val="0"/>
+              </a:spcAft>
+            </a:pPr>
+            <a:r>
+              <a:rPr sz="1050" b="0" i="0">
+                <a:solidFill>
+                  <a:srgbClr val="B4C7D2"/>
+                </a:solidFill>
+                <a:latin typeface="Arial"/>
+              </a:rPr>
+              <a:t>0.2</a:t>
+            </a:r>
+          </a:p>
+        </p:txBody>
+      </p:sp>
+      <p:cxnSp>
+        <p:nvCxnSpPr>
+          <p:cNvPr id="26" name="C3-E01 line 24" descr="sci-ppt:o024"/>
+          <p:cNvCxnSpPr/>
+          <p:nvPr/>
+        </p:nvCxnSpPr>
+        <p:spPr>
+          <a:xfrm>
+            <a:off x="850392" y="2416628"/>
+            <a:ext cx="64008" cy="0"/>
+          </a:xfrm>
+          <a:prstGeom prst="line">
+            <a:avLst/>
+          </a:prstGeom>
+          <a:ln w="12700">
             <a:solidFill>
               <a:srgbClr val="B4C7D2"/>
             </a:solidFill>
           </a:ln>
           <a:effectLst/>
         </p:spPr>
-        <p:txBody>
-          <a:bodyPr rtlCol="0" anchor="ctr"/>
-          <a:lstStyle/>
-          <a:p>
-            <a:pPr algn="ctr"/>
-          </a:p>
-        </p:txBody>
-      </p:sp>
-      <p:sp>
-        <p:nvSpPr>
-          <p:cNvPr id="13" name="C3-E01 ellipse 11" descr="sci-ppt:o011"/>
-          <p:cNvSpPr/>
-          <p:nvPr/>
-        </p:nvSpPr>
-        <p:spPr>
-          <a:xfrm>
-            <a:off x="1005840" y="2468879"/>
-            <a:ext cx="365760" cy="365760"/>
-          </a:xfrm>
-          <a:prstGeom prst="ellipse">
-            <a:avLst/>
-          </a:prstGeom>
-          <a:solidFill>
-            <a:srgbClr val="213E4B"/>
-          </a:solidFill>
-          <a:ln w="19050">
+      </p:cxnSp>
+      <p:cxnSp>
+        <p:nvCxnSpPr>
+          <p:cNvPr id="27" name="C3-E01 line 25" descr="sci-ppt:o025"/>
+          <p:cNvCxnSpPr/>
+          <p:nvPr/>
+        </p:nvCxnSpPr>
+        <p:spPr>
+          <a:xfrm>
+            <a:off x="914400" y="2416628"/>
+            <a:ext cx="6035040" cy="0"/>
+          </a:xfrm>
+          <a:prstGeom prst="line">
+            <a:avLst/>
+          </a:prstGeom>
+          <a:ln w="7620">
+            <a:solidFill>
+              <a:srgbClr val="2E4756"/>
+            </a:solidFill>
+          </a:ln>
+          <a:effectLst/>
+        </p:spPr>
+      </p:cxnSp>
+      <p:sp>
+        <p:nvSpPr>
+          <p:cNvPr id="28" name="C3-E01 text 26" descr="sci-ppt:o026"/>
+          <p:cNvSpPr txBox="1"/>
+          <p:nvPr/>
+        </p:nvSpPr>
+        <p:spPr>
+          <a:xfrm>
+            <a:off x="45720" y="2334332"/>
+            <a:ext cx="777240" cy="208407"/>
+          </a:xfrm>
+          <a:prstGeom prst="rect">
+            <a:avLst/>
+          </a:prstGeom>
+          <a:noFill/>
+          <a:effectLst/>
+        </p:spPr>
+        <p:txBody>
+          <a:bodyPr wrap="none" lIns="18288" rIns="18288" tIns="18288" bIns="18288" anchor="t">
+            <a:spAutoFit/>
+          </a:bodyPr>
+          <a:lstStyle/>
+          <a:p>
+            <a:pPr algn="r">
+              <a:spcAft>
+                <a:spcPts val="0"/>
+              </a:spcAft>
+            </a:pPr>
+            <a:r>
+              <a:rPr sz="1050" b="0" i="0">
+                <a:solidFill>
+                  <a:srgbClr val="B4C7D2"/>
+                </a:solidFill>
+                <a:latin typeface="Arial"/>
+              </a:rPr>
+              <a:t>0.3</a:t>
+            </a:r>
+          </a:p>
+        </p:txBody>
+      </p:sp>
+      <p:cxnSp>
+        <p:nvCxnSpPr>
+          <p:cNvPr id="29" name="C3-E01 line 27" descr="sci-ppt:o027"/>
+          <p:cNvCxnSpPr/>
+          <p:nvPr/>
+        </p:nvCxnSpPr>
+        <p:spPr>
+          <a:xfrm>
+            <a:off x="850392" y="1545771"/>
+            <a:ext cx="64008" cy="0"/>
+          </a:xfrm>
+          <a:prstGeom prst="line">
+            <a:avLst/>
+          </a:prstGeom>
+          <a:ln w="12700">
             <a:solidFill>
               <a:srgbClr val="B4C7D2"/>
             </a:solidFill>
           </a:ln>
           <a:effectLst/>
         </p:spPr>
-        <p:txBody>
-          <a:bodyPr rtlCol="0" anchor="ctr"/>
-          <a:lstStyle/>
-          <a:p>
-            <a:pPr algn="ctr"/>
-          </a:p>
-        </p:txBody>
-      </p:sp>
-      <p:sp>
-        <p:nvSpPr>
-          <p:cNvPr id="14" name="C3-E01 ellipse 12" descr="sci-ppt:o012"/>
-          <p:cNvSpPr/>
-          <p:nvPr/>
-        </p:nvSpPr>
-        <p:spPr>
-          <a:xfrm>
-            <a:off x="1627632" y="2468879"/>
-            <a:ext cx="365760" cy="365760"/>
-          </a:xfrm>
-          <a:prstGeom prst="ellipse">
-            <a:avLst/>
-          </a:prstGeom>
-          <a:solidFill>
-            <a:srgbClr val="213E4B"/>
-          </a:solidFill>
-          <a:ln w="19050">
+      </p:cxnSp>
+      <p:cxnSp>
+        <p:nvCxnSpPr>
+          <p:cNvPr id="30" name="C3-E01 line 28" descr="sci-ppt:o028"/>
+          <p:cNvCxnSpPr/>
+          <p:nvPr/>
+        </p:nvCxnSpPr>
+        <p:spPr>
+          <a:xfrm>
+            <a:off x="914400" y="1545771"/>
+            <a:ext cx="6035040" cy="0"/>
+          </a:xfrm>
+          <a:prstGeom prst="line">
+            <a:avLst/>
+          </a:prstGeom>
+          <a:ln w="7620">
             <a:solidFill>
-              <a:srgbClr val="B4C7D2"/>
+              <a:srgbClr val="2E4756"/>
             </a:solidFill>
           </a:ln>
           <a:effectLst/>
         </p:spPr>
-        <p:txBody>
-          <a:bodyPr rtlCol="0" anchor="ctr"/>
-          <a:lstStyle/>
-          <a:p>
-            <a:pPr algn="ctr"/>
-          </a:p>
-        </p:txBody>
-      </p:sp>
-      <p:sp>
-        <p:nvSpPr>
-          <p:cNvPr id="15" name="C3-E01 ellipse 13" descr="sci-ppt:o013"/>
-          <p:cNvSpPr/>
-          <p:nvPr/>
-        </p:nvSpPr>
-        <p:spPr>
-          <a:xfrm>
-            <a:off x="2249424" y="2468879"/>
-            <a:ext cx="365760" cy="365760"/>
-          </a:xfrm>
-          <a:prstGeom prst="ellipse">
+      </p:cxnSp>
+      <p:sp>
+        <p:nvSpPr>
+          <p:cNvPr id="31" name="C3-E01 text 29" descr="sci-ppt:o029"/>
+          <p:cNvSpPr txBox="1"/>
+          <p:nvPr/>
+        </p:nvSpPr>
+        <p:spPr>
+          <a:xfrm>
+            <a:off x="45720" y="1463475"/>
+            <a:ext cx="777240" cy="208407"/>
+          </a:xfrm>
+          <a:prstGeom prst="rect">
             <a:avLst/>
           </a:prstGeom>
           <a:noFill/>
-          <a:ln w="19050">
-            <a:solidFill>
-              <a:srgbClr val="B4C7D2"/>
-            </a:solidFill>
-          </a:ln>
-          <a:effectLst/>
-        </p:spPr>
-        <p:txBody>
-          <a:bodyPr rtlCol="0" anchor="ctr"/>
-          <a:lstStyle/>
-          <a:p>
-            <a:pPr algn="ctr"/>
-          </a:p>
-        </p:txBody>
-      </p:sp>
-      <p:sp>
-        <p:nvSpPr>
-          <p:cNvPr id="16" name="C3-E01 ellipse 14" descr="sci-ppt:o014"/>
-          <p:cNvSpPr/>
-          <p:nvPr/>
-        </p:nvSpPr>
-        <p:spPr>
-          <a:xfrm>
-            <a:off x="2871215" y="2468879"/>
-            <a:ext cx="365760" cy="365760"/>
-          </a:xfrm>
-          <a:prstGeom prst="ellipse">
-            <a:avLst/>
-          </a:prstGeom>
-          <a:solidFill>
-            <a:srgbClr val="213E4B"/>
-          </a:solidFill>
-          <a:ln w="19050">
-            <a:solidFill>
-              <a:srgbClr val="B4C7D2"/>
-            </a:solidFill>
-          </a:ln>
-          <a:effectLst/>
-        </p:spPr>
-        <p:txBody>
-          <a:bodyPr rtlCol="0" anchor="ctr"/>
-          <a:lstStyle/>
-          <a:p>
-            <a:pPr algn="ctr"/>
-          </a:p>
-        </p:txBody>
-      </p:sp>
-      <p:sp>
-        <p:nvSpPr>
-          <p:cNvPr id="17" name="C3-E01 ellipse 15" descr="sci-ppt:o015"/>
-          <p:cNvSpPr/>
-          <p:nvPr/>
-        </p:nvSpPr>
-        <p:spPr>
-          <a:xfrm>
-            <a:off x="3493008" y="2468879"/>
-            <a:ext cx="365760" cy="365760"/>
-          </a:xfrm>
-          <a:prstGeom prst="ellipse">
-            <a:avLst/>
-          </a:prstGeom>
-          <a:solidFill>
-            <a:srgbClr val="213E4B"/>
-          </a:solidFill>
-          <a:ln w="19050">
-            <a:solidFill>
-              <a:srgbClr val="B4C7D2"/>
-            </a:solidFill>
-          </a:ln>
-          <a:effectLst/>
-        </p:spPr>
-        <p:txBody>
-          <a:bodyPr rtlCol="0" anchor="ctr"/>
-          <a:lstStyle/>
-          <a:p>
-            <a:pPr algn="ctr"/>
-          </a:p>
-        </p:txBody>
-      </p:sp>
-      <p:sp>
-        <p:nvSpPr>
-          <p:cNvPr id="18" name="C3-E01 text 16" descr="sci-ppt:o016"/>
+          <a:effectLst/>
+        </p:spPr>
+        <p:txBody>
+          <a:bodyPr wrap="none" lIns="18288" rIns="18288" tIns="18288" bIns="18288" anchor="t">
+            <a:spAutoFit/>
+          </a:bodyPr>
+          <a:lstStyle/>
+          <a:p>
+            <a:pPr algn="r">
+              <a:spcAft>
+                <a:spcPts val="0"/>
+              </a:spcAft>
+            </a:pPr>
+            <a:r>
+              <a:rPr sz="1050" b="0" i="0">
+                <a:solidFill>
+                  <a:srgbClr val="B4C7D2"/>
+                </a:solidFill>
+                <a:latin typeface="Arial"/>
+              </a:rPr>
+              <a:t>0.4</a:t>
+            </a:r>
+          </a:p>
+        </p:txBody>
+      </p:sp>
+      <p:sp>
+        <p:nvSpPr>
+          <p:cNvPr id="32" name="C3-E01 text 30" descr="sci-ppt:o030"/>
           <p:cNvSpPr txBox="1"/>
           <p:nvPr/>
         </p:nvSpPr>
         <p:spPr>
           <a:xfrm>
-            <a:off x="5029200" y="1143000"/>
-            <a:ext cx="6126480" cy="548640"/>
+            <a:off x="914400" y="5312664"/>
+            <a:ext cx="6035040" cy="231648"/>
           </a:xfrm>
           <a:prstGeom prst="rect">
             <a:avLst/>
@@ -3626,7 +3954,47 @@
           <a:effectLst/>
         </p:spPr>
         <p:txBody>
-          <a:bodyPr wrap="square" lIns="27432" rIns="27432" tIns="18288" bIns="18288" anchor="ctr">
+          <a:bodyPr wrap="none" lIns="18288" rIns="18288" tIns="18288" bIns="18288" anchor="t">
+            <a:spAutoFit/>
+          </a:bodyPr>
+          <a:lstStyle/>
+          <a:p>
+            <a:pPr algn="ctr">
+              <a:spcAft>
+                <a:spcPts val="0"/>
+              </a:spcAft>
+            </a:pPr>
+            <a:r>
+              <a:rPr sz="1200" b="0" i="0">
+                <a:solidFill>
+                  <a:srgbClr val="E7F0F3"/>
+                </a:solidFill>
+                <a:latin typeface="Arial"/>
+              </a:rPr>
+              <a:t>activated sites N_b</a:t>
+            </a:r>
+          </a:p>
+        </p:txBody>
+      </p:sp>
+      <p:sp>
+        <p:nvSpPr>
+          <p:cNvPr id="33" name="C3-E01 text 31" descr="sci-ppt:o031"/>
+          <p:cNvSpPr txBox="1"/>
+          <p:nvPr/>
+        </p:nvSpPr>
+        <p:spPr>
+          <a:xfrm>
+            <a:off x="365760" y="1024128"/>
+            <a:ext cx="6035040" cy="231648"/>
+          </a:xfrm>
+          <a:prstGeom prst="rect">
+            <a:avLst/>
+          </a:prstGeom>
+          <a:noFill/>
+          <a:effectLst/>
+        </p:spPr>
+        <p:txBody>
+          <a:bodyPr wrap="none" lIns="18288" rIns="18288" tIns="18288" bIns="18288" anchor="t">
             <a:spAutoFit/>
           </a:bodyPr>
           <a:lstStyle/>
@@ -3637,27 +4005,626 @@
               </a:spcAft>
             </a:pPr>
             <a:r>
-              <a:rPr sz="2000" b="0" i="0">
+              <a:rPr sz="1200" b="0" i="0">
                 <a:solidFill>
                   <a:srgbClr val="E7F0F3"/>
                 </a:solidFill>
                 <a:latin typeface="Arial"/>
               </a:rPr>
-              <a:t>Fabricated sites N_d → activated sites N_b</a:t>
-            </a:r>
-          </a:p>
-        </p:txBody>
-      </p:sp>
-      <p:sp>
-        <p:nvSpPr>
-          <p:cNvPr id="19" name="C3-E01 text 17" descr="sci-ppt:o017"/>
+              <a:t>probability</a:t>
+            </a:r>
+          </a:p>
+        </p:txBody>
+      </p:sp>
+      <p:sp>
+        <p:nvSpPr>
+          <p:cNvPr id="34" name="C3-E01 rect 32" descr="sci-ppt:o032"/>
+          <p:cNvSpPr/>
+          <p:nvPr/>
+        </p:nvSpPr>
+        <p:spPr>
+          <a:xfrm>
+            <a:off x="988906" y="5029199"/>
+            <a:ext cx="298026" cy="0"/>
+          </a:xfrm>
+          <a:prstGeom prst="rect">
+            <a:avLst/>
+          </a:prstGeom>
+          <a:solidFill>
+            <a:srgbClr val="8EDBD4">
+              <a:alpha val="85000"/>
+            </a:srgbClr>
+          </a:solidFill>
+          <a:ln w="12700">
+            <a:solidFill>
+              <a:srgbClr val="8EDBD4">
+                <a:alpha val="85000"/>
+              </a:srgbClr>
+            </a:solidFill>
+          </a:ln>
+          <a:effectLst/>
+        </p:spPr>
+        <p:txBody>
+          <a:bodyPr rtlCol="0" anchor="ctr"/>
+          <a:lstStyle/>
+          <a:p>
+            <a:pPr algn="ctr"/>
+          </a:p>
+        </p:txBody>
+      </p:sp>
+      <p:sp>
+        <p:nvSpPr>
+          <p:cNvPr id="35" name="C3-E01 rect 33" descr="sci-ppt:o033"/>
+          <p:cNvSpPr/>
+          <p:nvPr/>
+        </p:nvSpPr>
+        <p:spPr>
+          <a:xfrm>
+            <a:off x="1361439" y="5029199"/>
+            <a:ext cx="298026" cy="0"/>
+          </a:xfrm>
+          <a:prstGeom prst="rect">
+            <a:avLst/>
+          </a:prstGeom>
+          <a:solidFill>
+            <a:srgbClr val="8EDBD4">
+              <a:alpha val="85000"/>
+            </a:srgbClr>
+          </a:solidFill>
+          <a:ln w="12700">
+            <a:solidFill>
+              <a:srgbClr val="8EDBD4">
+                <a:alpha val="85000"/>
+              </a:srgbClr>
+            </a:solidFill>
+          </a:ln>
+          <a:effectLst/>
+        </p:spPr>
+        <p:txBody>
+          <a:bodyPr rtlCol="0" anchor="ctr"/>
+          <a:lstStyle/>
+          <a:p>
+            <a:pPr algn="ctr"/>
+          </a:p>
+        </p:txBody>
+      </p:sp>
+      <p:sp>
+        <p:nvSpPr>
+          <p:cNvPr id="36" name="C3-E01 rect 34" descr="sci-ppt:o034"/>
+          <p:cNvSpPr/>
+          <p:nvPr/>
+        </p:nvSpPr>
+        <p:spPr>
+          <a:xfrm>
+            <a:off x="1733973" y="5029199"/>
+            <a:ext cx="298026" cy="0"/>
+          </a:xfrm>
+          <a:prstGeom prst="rect">
+            <a:avLst/>
+          </a:prstGeom>
+          <a:solidFill>
+            <a:srgbClr val="8EDBD4">
+              <a:alpha val="85000"/>
+            </a:srgbClr>
+          </a:solidFill>
+          <a:ln w="12700">
+            <a:solidFill>
+              <a:srgbClr val="8EDBD4">
+                <a:alpha val="85000"/>
+              </a:srgbClr>
+            </a:solidFill>
+          </a:ln>
+          <a:effectLst/>
+        </p:spPr>
+        <p:txBody>
+          <a:bodyPr rtlCol="0" anchor="ctr"/>
+          <a:lstStyle/>
+          <a:p>
+            <a:pPr algn="ctr"/>
+          </a:p>
+        </p:txBody>
+      </p:sp>
+      <p:sp>
+        <p:nvSpPr>
+          <p:cNvPr id="37" name="C3-E01 rect 35" descr="sci-ppt:o035"/>
+          <p:cNvSpPr/>
+          <p:nvPr/>
+        </p:nvSpPr>
+        <p:spPr>
+          <a:xfrm>
+            <a:off x="2106506" y="5029199"/>
+            <a:ext cx="298026" cy="0"/>
+          </a:xfrm>
+          <a:prstGeom prst="rect">
+            <a:avLst/>
+          </a:prstGeom>
+          <a:solidFill>
+            <a:srgbClr val="8EDBD4">
+              <a:alpha val="85000"/>
+            </a:srgbClr>
+          </a:solidFill>
+          <a:ln w="12700">
+            <a:solidFill>
+              <a:srgbClr val="8EDBD4">
+                <a:alpha val="85000"/>
+              </a:srgbClr>
+            </a:solidFill>
+          </a:ln>
+          <a:effectLst/>
+        </p:spPr>
+        <p:txBody>
+          <a:bodyPr rtlCol="0" anchor="ctr"/>
+          <a:lstStyle/>
+          <a:p>
+            <a:pPr algn="ctr"/>
+          </a:p>
+        </p:txBody>
+      </p:sp>
+      <p:sp>
+        <p:nvSpPr>
+          <p:cNvPr id="38" name="C3-E01 rect 36" descr="sci-ppt:o036"/>
+          <p:cNvSpPr/>
+          <p:nvPr/>
+        </p:nvSpPr>
+        <p:spPr>
+          <a:xfrm>
+            <a:off x="2479039" y="5029199"/>
+            <a:ext cx="298026" cy="0"/>
+          </a:xfrm>
+          <a:prstGeom prst="rect">
+            <a:avLst/>
+          </a:prstGeom>
+          <a:solidFill>
+            <a:srgbClr val="8EDBD4">
+              <a:alpha val="85000"/>
+            </a:srgbClr>
+          </a:solidFill>
+          <a:ln w="12700">
+            <a:solidFill>
+              <a:srgbClr val="8EDBD4">
+                <a:alpha val="85000"/>
+              </a:srgbClr>
+            </a:solidFill>
+          </a:ln>
+          <a:effectLst/>
+        </p:spPr>
+        <p:txBody>
+          <a:bodyPr rtlCol="0" anchor="ctr"/>
+          <a:lstStyle/>
+          <a:p>
+            <a:pPr algn="ctr"/>
+          </a:p>
+        </p:txBody>
+      </p:sp>
+      <p:sp>
+        <p:nvSpPr>
+          <p:cNvPr id="39" name="C3-E01 rect 37" descr="sci-ppt:o037"/>
+          <p:cNvSpPr/>
+          <p:nvPr/>
+        </p:nvSpPr>
+        <p:spPr>
+          <a:xfrm>
+            <a:off x="2851573" y="5029198"/>
+            <a:ext cx="298026" cy="1"/>
+          </a:xfrm>
+          <a:prstGeom prst="rect">
+            <a:avLst/>
+          </a:prstGeom>
+          <a:solidFill>
+            <a:srgbClr val="8EDBD4">
+              <a:alpha val="85000"/>
+            </a:srgbClr>
+          </a:solidFill>
+          <a:ln w="12700">
+            <a:solidFill>
+              <a:srgbClr val="8EDBD4">
+                <a:alpha val="85000"/>
+              </a:srgbClr>
+            </a:solidFill>
+          </a:ln>
+          <a:effectLst/>
+        </p:spPr>
+        <p:txBody>
+          <a:bodyPr rtlCol="0" anchor="ctr"/>
+          <a:lstStyle/>
+          <a:p>
+            <a:pPr algn="ctr"/>
+          </a:p>
+        </p:txBody>
+      </p:sp>
+      <p:sp>
+        <p:nvSpPr>
+          <p:cNvPr id="40" name="C3-E01 rect 38" descr="sci-ppt:o038"/>
+          <p:cNvSpPr/>
+          <p:nvPr/>
+        </p:nvSpPr>
+        <p:spPr>
+          <a:xfrm>
+            <a:off x="3224106" y="5029184"/>
+            <a:ext cx="298026" cy="15"/>
+          </a:xfrm>
+          <a:prstGeom prst="rect">
+            <a:avLst/>
+          </a:prstGeom>
+          <a:solidFill>
+            <a:srgbClr val="8EDBD4">
+              <a:alpha val="85000"/>
+            </a:srgbClr>
+          </a:solidFill>
+          <a:ln w="12700">
+            <a:solidFill>
+              <a:srgbClr val="8EDBD4">
+                <a:alpha val="85000"/>
+              </a:srgbClr>
+            </a:solidFill>
+          </a:ln>
+          <a:effectLst/>
+        </p:spPr>
+        <p:txBody>
+          <a:bodyPr rtlCol="0" anchor="ctr"/>
+          <a:lstStyle/>
+          <a:p>
+            <a:pPr algn="ctr"/>
+          </a:p>
+        </p:txBody>
+      </p:sp>
+      <p:sp>
+        <p:nvSpPr>
+          <p:cNvPr id="41" name="C3-E01 rect 39" descr="sci-ppt:o039"/>
+          <p:cNvSpPr/>
+          <p:nvPr/>
+        </p:nvSpPr>
+        <p:spPr>
+          <a:xfrm>
+            <a:off x="3596640" y="5029046"/>
+            <a:ext cx="298026" cy="153"/>
+          </a:xfrm>
+          <a:prstGeom prst="rect">
+            <a:avLst/>
+          </a:prstGeom>
+          <a:solidFill>
+            <a:srgbClr val="8EDBD4">
+              <a:alpha val="85000"/>
+            </a:srgbClr>
+          </a:solidFill>
+          <a:ln w="12700">
+            <a:solidFill>
+              <a:srgbClr val="8EDBD4">
+                <a:alpha val="85000"/>
+              </a:srgbClr>
+            </a:solidFill>
+          </a:ln>
+          <a:effectLst/>
+        </p:spPr>
+        <p:txBody>
+          <a:bodyPr rtlCol="0" anchor="ctr"/>
+          <a:lstStyle/>
+          <a:p>
+            <a:pPr algn="ctr"/>
+          </a:p>
+        </p:txBody>
+      </p:sp>
+      <p:sp>
+        <p:nvSpPr>
+          <p:cNvPr id="42" name="C3-E01 rect 40" descr="sci-ppt:o040"/>
+          <p:cNvSpPr/>
+          <p:nvPr/>
+        </p:nvSpPr>
+        <p:spPr>
+          <a:xfrm>
+            <a:off x="3969173" y="5027900"/>
+            <a:ext cx="298026" cy="1299"/>
+          </a:xfrm>
+          <a:prstGeom prst="rect">
+            <a:avLst/>
+          </a:prstGeom>
+          <a:solidFill>
+            <a:srgbClr val="8EDBD4">
+              <a:alpha val="85000"/>
+            </a:srgbClr>
+          </a:solidFill>
+          <a:ln w="12700">
+            <a:solidFill>
+              <a:srgbClr val="8EDBD4">
+                <a:alpha val="85000"/>
+              </a:srgbClr>
+            </a:solidFill>
+          </a:ln>
+          <a:effectLst/>
+        </p:spPr>
+        <p:txBody>
+          <a:bodyPr rtlCol="0" anchor="ctr"/>
+          <a:lstStyle/>
+          <a:p>
+            <a:pPr algn="ctr"/>
+          </a:p>
+        </p:txBody>
+      </p:sp>
+      <p:sp>
+        <p:nvSpPr>
+          <p:cNvPr id="43" name="C3-E01 rect 41" descr="sci-ppt:o041"/>
+          <p:cNvSpPr/>
+          <p:nvPr/>
+        </p:nvSpPr>
+        <p:spPr>
+          <a:xfrm>
+            <a:off x="4341706" y="5020106"/>
+            <a:ext cx="298026" cy="9093"/>
+          </a:xfrm>
+          <a:prstGeom prst="rect">
+            <a:avLst/>
+          </a:prstGeom>
+          <a:solidFill>
+            <a:srgbClr val="8EDBD4">
+              <a:alpha val="85000"/>
+            </a:srgbClr>
+          </a:solidFill>
+          <a:ln w="12700">
+            <a:solidFill>
+              <a:srgbClr val="8EDBD4">
+                <a:alpha val="85000"/>
+              </a:srgbClr>
+            </a:solidFill>
+          </a:ln>
+          <a:effectLst/>
+        </p:spPr>
+        <p:txBody>
+          <a:bodyPr rtlCol="0" anchor="ctr"/>
+          <a:lstStyle/>
+          <a:p>
+            <a:pPr algn="ctr"/>
+          </a:p>
+        </p:txBody>
+      </p:sp>
+      <p:sp>
+        <p:nvSpPr>
+          <p:cNvPr id="44" name="C3-E01 rect 42" descr="sci-ppt:o042"/>
+          <p:cNvSpPr/>
+          <p:nvPr/>
+        </p:nvSpPr>
+        <p:spPr>
+          <a:xfrm>
+            <a:off x="4714239" y="4977366"/>
+            <a:ext cx="298026" cy="51833"/>
+          </a:xfrm>
+          <a:prstGeom prst="rect">
+            <a:avLst/>
+          </a:prstGeom>
+          <a:solidFill>
+            <a:srgbClr val="8EDBD4">
+              <a:alpha val="85000"/>
+            </a:srgbClr>
+          </a:solidFill>
+          <a:ln w="12700">
+            <a:solidFill>
+              <a:srgbClr val="8EDBD4">
+                <a:alpha val="85000"/>
+              </a:srgbClr>
+            </a:solidFill>
+          </a:ln>
+          <a:effectLst/>
+        </p:spPr>
+        <p:txBody>
+          <a:bodyPr rtlCol="0" anchor="ctr"/>
+          <a:lstStyle/>
+          <a:p>
+            <a:pPr algn="ctr"/>
+          </a:p>
+        </p:txBody>
+      </p:sp>
+      <p:sp>
+        <p:nvSpPr>
+          <p:cNvPr id="45" name="C3-E01 rect 43" descr="sci-ppt:o043"/>
+          <p:cNvSpPr/>
+          <p:nvPr/>
+        </p:nvSpPr>
+        <p:spPr>
+          <a:xfrm>
+            <a:off x="5086773" y="4794716"/>
+            <a:ext cx="298026" cy="234483"/>
+          </a:xfrm>
+          <a:prstGeom prst="rect">
+            <a:avLst/>
+          </a:prstGeom>
+          <a:solidFill>
+            <a:srgbClr val="8EDBD4">
+              <a:alpha val="85000"/>
+            </a:srgbClr>
+          </a:solidFill>
+          <a:ln w="12700">
+            <a:solidFill>
+              <a:srgbClr val="8EDBD4">
+                <a:alpha val="85000"/>
+              </a:srgbClr>
+            </a:solidFill>
+          </a:ln>
+          <a:effectLst/>
+        </p:spPr>
+        <p:txBody>
+          <a:bodyPr rtlCol="0" anchor="ctr"/>
+          <a:lstStyle/>
+          <a:p>
+            <a:pPr algn="ctr"/>
+          </a:p>
+        </p:txBody>
+      </p:sp>
+      <p:sp>
+        <p:nvSpPr>
+          <p:cNvPr id="46" name="C3-E01 rect 44" descr="sci-ppt:o044"/>
+          <p:cNvSpPr/>
+          <p:nvPr/>
+        </p:nvSpPr>
+        <p:spPr>
+          <a:xfrm>
+            <a:off x="5459306" y="4219164"/>
+            <a:ext cx="298026" cy="810035"/>
+          </a:xfrm>
+          <a:prstGeom prst="rect">
+            <a:avLst/>
+          </a:prstGeom>
+          <a:solidFill>
+            <a:srgbClr val="8EDBD4">
+              <a:alpha val="85000"/>
+            </a:srgbClr>
+          </a:solidFill>
+          <a:ln w="12700">
+            <a:solidFill>
+              <a:srgbClr val="8EDBD4">
+                <a:alpha val="85000"/>
+              </a:srgbClr>
+            </a:solidFill>
+          </a:ln>
+          <a:effectLst/>
+        </p:spPr>
+        <p:txBody>
+          <a:bodyPr rtlCol="0" anchor="ctr"/>
+          <a:lstStyle/>
+          <a:p>
+            <a:pPr algn="ctr"/>
+          </a:p>
+        </p:txBody>
+      </p:sp>
+      <p:sp>
+        <p:nvSpPr>
+          <p:cNvPr id="47" name="C3-E01 rect 45" descr="sci-ppt:o045"/>
+          <p:cNvSpPr/>
+          <p:nvPr/>
+        </p:nvSpPr>
+        <p:spPr>
+          <a:xfrm>
+            <a:off x="5831840" y="3021720"/>
+            <a:ext cx="298026" cy="2007479"/>
+          </a:xfrm>
+          <a:prstGeom prst="rect">
+            <a:avLst/>
+          </a:prstGeom>
+          <a:solidFill>
+            <a:srgbClr val="8EDBD4">
+              <a:alpha val="85000"/>
+            </a:srgbClr>
+          </a:solidFill>
+          <a:ln w="12700">
+            <a:solidFill>
+              <a:srgbClr val="8EDBD4">
+                <a:alpha val="85000"/>
+              </a:srgbClr>
+            </a:solidFill>
+          </a:ln>
+          <a:effectLst/>
+        </p:spPr>
+        <p:txBody>
+          <a:bodyPr rtlCol="0" anchor="ctr"/>
+          <a:lstStyle/>
+          <a:p>
+            <a:pPr algn="ctr"/>
+          </a:p>
+        </p:txBody>
+      </p:sp>
+      <p:sp>
+        <p:nvSpPr>
+          <p:cNvPr id="48" name="C3-E01 rect 46" descr="sci-ppt:o046"/>
+          <p:cNvSpPr/>
+          <p:nvPr/>
+        </p:nvSpPr>
+        <p:spPr>
+          <a:xfrm>
+            <a:off x="6204373" y="1850690"/>
+            <a:ext cx="298026" cy="3178509"/>
+          </a:xfrm>
+          <a:prstGeom prst="rect">
+            <a:avLst/>
+          </a:prstGeom>
+          <a:solidFill>
+            <a:srgbClr val="8EDBD4">
+              <a:alpha val="85000"/>
+            </a:srgbClr>
+          </a:solidFill>
+          <a:ln w="12700">
+            <a:solidFill>
+              <a:srgbClr val="8EDBD4">
+                <a:alpha val="85000"/>
+              </a:srgbClr>
+            </a:solidFill>
+          </a:ln>
+          <a:effectLst/>
+        </p:spPr>
+        <p:txBody>
+          <a:bodyPr rtlCol="0" anchor="ctr"/>
+          <a:lstStyle/>
+          <a:p>
+            <a:pPr algn="ctr"/>
+          </a:p>
+        </p:txBody>
+      </p:sp>
+      <p:sp>
+        <p:nvSpPr>
+          <p:cNvPr id="49" name="C3-E01 rect 47" descr="sci-ppt:o047"/>
+          <p:cNvSpPr/>
+          <p:nvPr/>
+        </p:nvSpPr>
+        <p:spPr>
+          <a:xfrm>
+            <a:off x="6576906" y="2613533"/>
+            <a:ext cx="298026" cy="2415666"/>
+          </a:xfrm>
+          <a:prstGeom prst="rect">
+            <a:avLst/>
+          </a:prstGeom>
+          <a:solidFill>
+            <a:srgbClr val="F2B880">
+              <a:alpha val="85000"/>
+            </a:srgbClr>
+          </a:solidFill>
+          <a:ln w="12700">
+            <a:solidFill>
+              <a:srgbClr val="F2B880">
+                <a:alpha val="85000"/>
+              </a:srgbClr>
+            </a:solidFill>
+          </a:ln>
+          <a:effectLst/>
+        </p:spPr>
+        <p:txBody>
+          <a:bodyPr rtlCol="0" anchor="ctr"/>
+          <a:lstStyle/>
+          <a:p>
+            <a:pPr algn="ctr"/>
+          </a:p>
+        </p:txBody>
+      </p:sp>
+      <p:cxnSp>
+        <p:nvCxnSpPr>
+          <p:cNvPr id="50" name="C3-E01 line 48" descr="sci-ppt:o048"/>
+          <p:cNvCxnSpPr/>
+          <p:nvPr/>
+        </p:nvCxnSpPr>
+        <p:spPr>
+          <a:xfrm>
+            <a:off x="6260253" y="1371600"/>
+            <a:ext cx="0" cy="3657600"/>
+          </a:xfrm>
+          <a:prstGeom prst="line">
+            <a:avLst/>
+          </a:prstGeom>
+          <a:ln w="16510">
+            <a:solidFill>
+              <a:srgbClr val="F28BA0"/>
+            </a:solidFill>
+            <a:prstDash val="dash"/>
+          </a:ln>
+          <a:effectLst/>
+        </p:spPr>
+      </p:cxnSp>
+      <p:sp>
+        <p:nvSpPr>
+          <p:cNvPr id="51" name="C3-E01 text 49" descr="sci-ppt:o049"/>
           <p:cNvSpPr txBox="1"/>
           <p:nvPr/>
         </p:nvSpPr>
         <p:spPr>
           <a:xfrm>
-            <a:off x="5029200" y="1920240"/>
-            <a:ext cx="6126480" cy="914400"/>
+            <a:off x="4705773" y="1458685"/>
+            <a:ext cx="1463040" cy="239395"/>
           </a:xfrm>
           <a:prstGeom prst="rect">
             <a:avLst/>
@@ -3666,7 +4633,7 @@
           <a:effectLst/>
         </p:spPr>
         <p:txBody>
-          <a:bodyPr wrap="square" lIns="27432" rIns="27432" tIns="18288" bIns="18288" anchor="ctr">
+          <a:bodyPr wrap="none" lIns="18288" rIns="18288" tIns="18288" bIns="18288" anchor="t">
             <a:spAutoFit/>
           </a:bodyPr>
           <a:lstStyle/>
@@ -3677,15 +4644,191 @@
               </a:spcAft>
             </a:pPr>
             <a:r>
-              <a:rPr sz="1700" b="0" i="0">
+              <a:rPr sz="1250" b="0" i="0">
+                <a:solidFill>
+                  <a:srgbClr val="F28BA0"/>
+                </a:solidFill>
+                <a:latin typeface="Arial"/>
+              </a:rPr>
+              <a:t>mean 23.75</a:t>
+            </a:r>
+          </a:p>
+        </p:txBody>
+      </p:sp>
+      <p:sp>
+        <p:nvSpPr>
+          <p:cNvPr id="52" name="C3-E01 text 50" descr="sci-ppt:o050"/>
+          <p:cNvSpPr txBox="1"/>
+          <p:nvPr/>
+        </p:nvSpPr>
+        <p:spPr>
+          <a:xfrm>
+            <a:off x="4897119" y="2156333"/>
+            <a:ext cx="1737360" cy="239395"/>
+          </a:xfrm>
+          <a:prstGeom prst="rect">
+            <a:avLst/>
+          </a:prstGeom>
+          <a:noFill/>
+          <a:effectLst/>
+        </p:spPr>
+        <p:txBody>
+          <a:bodyPr wrap="none" lIns="18288" rIns="18288" tIns="18288" bIns="18288" anchor="t">
+            <a:spAutoFit/>
+          </a:bodyPr>
+          <a:lstStyle/>
+          <a:p>
+            <a:pPr algn="l">
+              <a:spcAft>
+                <a:spcPts val="0"/>
+              </a:spcAft>
+            </a:pPr>
+            <a:r>
+              <a:rPr sz="1250" b="0" i="0">
+                <a:solidFill>
+                  <a:srgbClr val="F2B880"/>
+                </a:solidFill>
+                <a:latin typeface="Arial"/>
+              </a:rPr>
+              <a:t>all 25: 27.7 %</a:t>
+            </a:r>
+          </a:p>
+        </p:txBody>
+      </p:sp>
+      <p:sp>
+        <p:nvSpPr>
+          <p:cNvPr id="53" name="C3-E01 round_rect 51" descr="sci-ppt:o051"/>
+          <p:cNvSpPr/>
+          <p:nvPr/>
+        </p:nvSpPr>
+        <p:spPr>
+          <a:xfrm>
+            <a:off x="7223760" y="1371600"/>
+            <a:ext cx="4617720" cy="3657600"/>
+          </a:xfrm>
+          <a:prstGeom prst="roundRect">
+            <a:avLst/>
+          </a:prstGeom>
+          <a:solidFill>
+            <a:srgbClr val="213E4B"/>
+          </a:solidFill>
+          <a:ln w="20320">
+            <a:solidFill>
+              <a:srgbClr val="8EDBD4"/>
+            </a:solidFill>
+          </a:ln>
+          <a:effectLst/>
+        </p:spPr>
+        <p:txBody>
+          <a:bodyPr rtlCol="0" anchor="ctr"/>
+          <a:lstStyle/>
+          <a:p>
+            <a:pPr algn="ctr"/>
+          </a:p>
+        </p:txBody>
+      </p:sp>
+      <p:sp>
+        <p:nvSpPr>
+          <p:cNvPr id="54" name="C3-E01 text 52" descr="sci-ppt:o052"/>
+          <p:cNvSpPr txBox="1"/>
+          <p:nvPr/>
+        </p:nvSpPr>
+        <p:spPr>
+          <a:xfrm>
+            <a:off x="7333488" y="1426464"/>
+            <a:ext cx="4398264" cy="247142"/>
+          </a:xfrm>
+          <a:prstGeom prst="rect">
+            <a:avLst/>
+          </a:prstGeom>
+          <a:noFill/>
+          <a:effectLst/>
+        </p:spPr>
+        <p:txBody>
+          <a:bodyPr wrap="none" lIns="18288" rIns="18288" tIns="18288" bIns="18288" anchor="t">
+            <a:spAutoFit/>
+          </a:bodyPr>
+          <a:lstStyle/>
+          <a:p>
+            <a:pPr algn="l">
+              <a:spcAft>
+                <a:spcPts val="0"/>
+              </a:spcAft>
+            </a:pPr>
+            <a:r>
+              <a:rPr sz="1300" b="1" i="0">
+                <a:solidFill>
+                  <a:srgbClr val="8EDBD4"/>
+                </a:solidFill>
+                <a:latin typeface="Arial"/>
+              </a:rPr>
+              <a:t>N_d = 25 independent sites, pₐ = 0.95</a:t>
+            </a:r>
+          </a:p>
+        </p:txBody>
+      </p:sp>
+      <p:sp>
+        <p:nvSpPr>
+          <p:cNvPr id="55" name="C3-E01 text 53" descr="sci-ppt:o053"/>
+          <p:cNvSpPr txBox="1"/>
+          <p:nvPr/>
+        </p:nvSpPr>
+        <p:spPr>
+          <a:xfrm>
+            <a:off x="7360920" y="1828800"/>
+            <a:ext cx="3200400" cy="231648"/>
+          </a:xfrm>
+          <a:prstGeom prst="rect">
+            <a:avLst/>
+          </a:prstGeom>
+          <a:noFill/>
+          <a:effectLst/>
+        </p:spPr>
+        <p:txBody>
+          <a:bodyPr wrap="none" lIns="18288" rIns="18288" tIns="18288" bIns="18288" anchor="t">
+            <a:spAutoFit/>
+          </a:bodyPr>
+          <a:lstStyle/>
+          <a:p>
+            <a:pPr algn="l">
+              <a:spcAft>
+                <a:spcPts val="0"/>
+              </a:spcAft>
+            </a:pPr>
+            <a:r>
+              <a:rPr sz="1200" b="0" i="0">
                 <a:solidFill>
                   <a:srgbClr val="E7F0F3"/>
                 </a:solidFill>
                 <a:latin typeface="Arial"/>
               </a:rPr>
-              <a:t>Independent Bernoulli events with probability p_a</a:t>
-            </a:r>
-          </a:p>
+              <a:t>E[N_b] = N_d pₐ</a:t>
+            </a:r>
+          </a:p>
+        </p:txBody>
+      </p:sp>
+      <p:sp>
+        <p:nvSpPr>
+          <p:cNvPr id="56" name="C3-E01 text 54" descr="sci-ppt:o054"/>
+          <p:cNvSpPr txBox="1"/>
+          <p:nvPr/>
+        </p:nvSpPr>
+        <p:spPr>
+          <a:xfrm>
+            <a:off x="10424160" y="1828800"/>
+            <a:ext cx="1280160" cy="247142"/>
+          </a:xfrm>
+          <a:prstGeom prst="rect">
+            <a:avLst/>
+          </a:prstGeom>
+          <a:noFill/>
+          <a:effectLst/>
+        </p:spPr>
+        <p:txBody>
+          <a:bodyPr wrap="none" lIns="18288" rIns="18288" tIns="18288" bIns="18288" anchor="t">
+            <a:spAutoFit/>
+          </a:bodyPr>
+          <a:lstStyle/>
           <a:p>
             <a:pPr algn="l">
               <a:spcAft>
@@ -3693,27 +4836,67 @@
               </a:spcAft>
             </a:pPr>
             <a:r>
-              <a:rPr sz="1700" b="0" i="0">
+              <a:rPr sz="1300" b="1" i="0">
+                <a:solidFill>
+                  <a:srgbClr val="F2B880"/>
+                </a:solidFill>
+                <a:latin typeface="Arial"/>
+              </a:rPr>
+              <a:t>23.75</a:t>
+            </a:r>
+          </a:p>
+        </p:txBody>
+      </p:sp>
+      <p:sp>
+        <p:nvSpPr>
+          <p:cNvPr id="57" name="C3-E01 text 55" descr="sci-ppt:o055"/>
+          <p:cNvSpPr txBox="1"/>
+          <p:nvPr/>
+        </p:nvSpPr>
+        <p:spPr>
+          <a:xfrm>
+            <a:off x="7360920" y="2331720"/>
+            <a:ext cx="3200400" cy="231648"/>
+          </a:xfrm>
+          <a:prstGeom prst="rect">
+            <a:avLst/>
+          </a:prstGeom>
+          <a:noFill/>
+          <a:effectLst/>
+        </p:spPr>
+        <p:txBody>
+          <a:bodyPr wrap="none" lIns="18288" rIns="18288" tIns="18288" bIns="18288" anchor="t">
+            <a:spAutoFit/>
+          </a:bodyPr>
+          <a:lstStyle/>
+          <a:p>
+            <a:pPr algn="l">
+              <a:spcAft>
+                <a:spcPts val="0"/>
+              </a:spcAft>
+            </a:pPr>
+            <a:r>
+              <a:rPr sz="1200" b="0" i="0">
                 <a:solidFill>
                   <a:srgbClr val="E7F0F3"/>
                 </a:solidFill>
                 <a:latin typeface="Arial"/>
               </a:rPr>
-              <a:t>Outline circles indicate inactive sites.</a:t>
-            </a:r>
-          </a:p>
-        </p:txBody>
-      </p:sp>
-      <p:sp>
-        <p:nvSpPr>
-          <p:cNvPr id="20" name="C3-E01 text 18" descr="sci-ppt:o018"/>
+              <a:t>Var(N_b) = N_d pₐ (1 − pₐ)</a:t>
+            </a:r>
+          </a:p>
+        </p:txBody>
+      </p:sp>
+      <p:sp>
+        <p:nvSpPr>
+          <p:cNvPr id="58" name="C3-E01 text 56" descr="sci-ppt:o056"/>
           <p:cNvSpPr txBox="1"/>
           <p:nvPr/>
         </p:nvSpPr>
         <p:spPr>
           <a:xfrm>
-            <a:off x="5029200" y="2971800"/>
-            <a:ext cx="6126480" cy="457200"/>
+            <a:off x="10424160" y="2331720"/>
+            <a:ext cx="1280160" cy="247142"/>
           </a:xfrm>
           <a:prstGeom prst="rect">
             <a:avLst/>
@@ -3722,7 +4905,7 @@
           <a:effectLst/>
         </p:spPr>
         <p:txBody>
-          <a:bodyPr wrap="square" lIns="27432" rIns="27432" tIns="18288" bIns="18288" anchor="ctr">
+          <a:bodyPr wrap="none" lIns="18288" rIns="18288" tIns="18288" bIns="18288" anchor="t">
             <a:spAutoFit/>
           </a:bodyPr>
           <a:lstStyle/>
@@ -3733,49 +4916,27 @@
               </a:spcAft>
             </a:pPr>
             <a:r>
-              <a:rPr sz="1700" b="0" i="0">
+              <a:rPr sz="1300" b="1" i="0">
                 <a:solidFill>
-                  <a:srgbClr val="8EDBD4"/>
+                  <a:srgbClr val="F2B880"/>
                 </a:solidFill>
                 <a:latin typeface="Arial"/>
               </a:rPr>
-              <a:t>Count reproducibility and complete activation differ.</a:t>
-            </a:r>
-          </a:p>
-        </p:txBody>
-      </p:sp>
-      <p:cxnSp>
-        <p:nvCxnSpPr>
-          <p:cNvPr id="21" name="C3-E01 line 19" descr="sci-ppt:o019"/>
-          <p:cNvCxnSpPr/>
-          <p:nvPr/>
-        </p:nvCxnSpPr>
-        <p:spPr>
-          <a:xfrm>
-            <a:off x="274320" y="3977639"/>
-            <a:ext cx="11612880" cy="0"/>
-          </a:xfrm>
-          <a:prstGeom prst="line">
-            <a:avLst/>
-          </a:prstGeom>
-          <a:ln w="12700">
-            <a:solidFill>
-              <a:srgbClr val="405967"/>
-            </a:solidFill>
-          </a:ln>
-          <a:effectLst/>
-        </p:spPr>
-      </p:cxnSp>
-      <p:sp>
-        <p:nvSpPr>
-          <p:cNvPr id="22" name="C3-E01 text 20" descr="sci-ppt:o020"/>
+              <a:t>1.1875</a:t>
+            </a:r>
+          </a:p>
+        </p:txBody>
+      </p:sp>
+      <p:sp>
+        <p:nvSpPr>
+          <p:cNvPr id="59" name="C3-E01 text 57" descr="sci-ppt:o057"/>
           <p:cNvSpPr txBox="1"/>
           <p:nvPr/>
         </p:nvSpPr>
         <p:spPr>
           <a:xfrm>
-            <a:off x="320040" y="4096512"/>
-            <a:ext cx="5715000" cy="246888"/>
+            <a:off x="7360920" y="2834639"/>
+            <a:ext cx="3200400" cy="231648"/>
           </a:xfrm>
           <a:prstGeom prst="rect">
             <a:avLst/>
@@ -3784,7 +4945,7 @@
           <a:effectLst/>
         </p:spPr>
         <p:txBody>
-          <a:bodyPr wrap="square" lIns="27432" rIns="27432" tIns="18288" bIns="18288" anchor="ctr">
+          <a:bodyPr wrap="none" lIns="18288" rIns="18288" tIns="18288" bIns="18288" anchor="t">
             <a:spAutoFit/>
           </a:bodyPr>
           <a:lstStyle/>
@@ -3795,27 +4956,259 @@
               </a:spcAft>
             </a:pPr>
             <a:r>
-              <a:rPr sz="1150" b="0" i="0">
+              <a:rPr sz="1200" b="0" i="0">
+                <a:solidFill>
+                  <a:srgbClr val="E7F0F3"/>
+                </a:solidFill>
+                <a:latin typeface="Arial"/>
+              </a:rPr>
+              <a:t>CV = √[(1 − pₐ)/(N_d pₐ)]</a:t>
+            </a:r>
+          </a:p>
+        </p:txBody>
+      </p:sp>
+      <p:sp>
+        <p:nvSpPr>
+          <p:cNvPr id="60" name="C3-E01 text 58" descr="sci-ppt:o058"/>
+          <p:cNvSpPr txBox="1"/>
+          <p:nvPr/>
+        </p:nvSpPr>
+        <p:spPr>
+          <a:xfrm>
+            <a:off x="10424160" y="2834639"/>
+            <a:ext cx="1280160" cy="247142"/>
+          </a:xfrm>
+          <a:prstGeom prst="rect">
+            <a:avLst/>
+          </a:prstGeom>
+          <a:noFill/>
+          <a:effectLst/>
+        </p:spPr>
+        <p:txBody>
+          <a:bodyPr wrap="none" lIns="18288" rIns="18288" tIns="18288" bIns="18288" anchor="t">
+            <a:spAutoFit/>
+          </a:bodyPr>
+          <a:lstStyle/>
+          <a:p>
+            <a:pPr algn="l">
+              <a:spcAft>
+                <a:spcPts val="0"/>
+              </a:spcAft>
+            </a:pPr>
+            <a:r>
+              <a:rPr sz="1300" b="1" i="0">
+                <a:solidFill>
+                  <a:srgbClr val="F2B880"/>
+                </a:solidFill>
+                <a:latin typeface="Arial"/>
+              </a:rPr>
+              <a:t>4.588 %</a:t>
+            </a:r>
+          </a:p>
+        </p:txBody>
+      </p:sp>
+      <p:sp>
+        <p:nvSpPr>
+          <p:cNvPr id="61" name="C3-E01 text 59" descr="sci-ppt:o059"/>
+          <p:cNvSpPr txBox="1"/>
+          <p:nvPr/>
+        </p:nvSpPr>
+        <p:spPr>
+          <a:xfrm>
+            <a:off x="7360920" y="3337559"/>
+            <a:ext cx="3200400" cy="231648"/>
+          </a:xfrm>
+          <a:prstGeom prst="rect">
+            <a:avLst/>
+          </a:prstGeom>
+          <a:noFill/>
+          <a:effectLst/>
+        </p:spPr>
+        <p:txBody>
+          <a:bodyPr wrap="none" lIns="18288" rIns="18288" tIns="18288" bIns="18288" anchor="t">
+            <a:spAutoFit/>
+          </a:bodyPr>
+          <a:lstStyle/>
+          <a:p>
+            <a:pPr algn="l">
+              <a:spcAft>
+                <a:spcPts val="0"/>
+              </a:spcAft>
+            </a:pPr>
+            <a:r>
+              <a:rPr sz="1200" b="0" i="0">
+                <a:solidFill>
+                  <a:srgbClr val="E7F0F3"/>
+                </a:solidFill>
+                <a:latin typeface="Arial"/>
+              </a:rPr>
+              <a:t>Pr(N_b = N_d) = pₐ^N_d</a:t>
+            </a:r>
+          </a:p>
+        </p:txBody>
+      </p:sp>
+      <p:sp>
+        <p:nvSpPr>
+          <p:cNvPr id="62" name="C3-E01 text 60" descr="sci-ppt:o060"/>
+          <p:cNvSpPr txBox="1"/>
+          <p:nvPr/>
+        </p:nvSpPr>
+        <p:spPr>
+          <a:xfrm>
+            <a:off x="10424160" y="3337559"/>
+            <a:ext cx="1280160" cy="247142"/>
+          </a:xfrm>
+          <a:prstGeom prst="rect">
+            <a:avLst/>
+          </a:prstGeom>
+          <a:noFill/>
+          <a:effectLst/>
+        </p:spPr>
+        <p:txBody>
+          <a:bodyPr wrap="none" lIns="18288" rIns="18288" tIns="18288" bIns="18288" anchor="t">
+            <a:spAutoFit/>
+          </a:bodyPr>
+          <a:lstStyle/>
+          <a:p>
+            <a:pPr algn="l">
+              <a:spcAft>
+                <a:spcPts val="0"/>
+              </a:spcAft>
+            </a:pPr>
+            <a:r>
+              <a:rPr sz="1300" b="1" i="0">
+                <a:solidFill>
+                  <a:srgbClr val="F2B880"/>
+                </a:solidFill>
+                <a:latin typeface="Arial"/>
+              </a:rPr>
+              <a:t>0.27739</a:t>
+            </a:r>
+          </a:p>
+        </p:txBody>
+      </p:sp>
+      <p:sp>
+        <p:nvSpPr>
+          <p:cNvPr id="63" name="C3-E01 text 61" descr="sci-ppt:o061"/>
+          <p:cNvSpPr txBox="1"/>
+          <p:nvPr/>
+        </p:nvSpPr>
+        <p:spPr>
+          <a:xfrm>
+            <a:off x="7360920" y="3977639"/>
+            <a:ext cx="4389120" cy="603504"/>
+          </a:xfrm>
+          <a:prstGeom prst="rect">
+            <a:avLst/>
+          </a:prstGeom>
+          <a:noFill/>
+          <a:effectLst/>
+        </p:spPr>
+        <p:txBody>
+          <a:bodyPr wrap="none" lIns="18288" rIns="18288" tIns="18288" bIns="18288" anchor="t">
+            <a:spAutoFit/>
+          </a:bodyPr>
+          <a:lstStyle/>
+          <a:p>
+            <a:pPr algn="l">
+              <a:spcAft>
+                <a:spcPts val="0"/>
+              </a:spcAft>
+            </a:pPr>
+            <a:r>
+              <a:rPr sz="1200" b="0" i="0">
+                <a:solidFill>
+                  <a:srgbClr val="E7F0F3"/>
+                </a:solidFill>
+                <a:latin typeface="Arial"/>
+              </a:rPr>
+              <a:t>Count reproducibility (CV small) and complete</a:t>
+            </a:r>
+          </a:p>
+          <a:p>
+            <a:pPr algn="l">
+              <a:spcAft>
+                <a:spcPts val="0"/>
+              </a:spcAft>
+            </a:pPr>
+            <a:r>
+              <a:rPr sz="1200" b="0" i="0">
+                <a:solidFill>
+                  <a:srgbClr val="E7F0F3"/>
+                </a:solidFill>
+                <a:latin typeface="Arial"/>
+              </a:rPr>
+              <a:t>activation (all 25) are different tests: here CV is</a:t>
+            </a:r>
+          </a:p>
+          <a:p>
+            <a:pPr algn="l">
+              <a:spcAft>
+                <a:spcPts val="0"/>
+              </a:spcAft>
+            </a:pPr>
+            <a:r>
+              <a:rPr sz="1200" b="0" i="0">
+                <a:solidFill>
+                  <a:srgbClr val="E7F0F3"/>
+                </a:solidFill>
+                <a:latin typeface="Arial"/>
+              </a:rPr>
+              <a:t>4.6 % but all 25 fire in only 28 % of shots.</a:t>
+            </a:r>
+          </a:p>
+        </p:txBody>
+      </p:sp>
+      <p:sp>
+        <p:nvSpPr>
+          <p:cNvPr id="64" name="C3-E01 text 62" descr="sci-ppt:o062"/>
+          <p:cNvSpPr txBox="1"/>
+          <p:nvPr/>
+        </p:nvSpPr>
+        <p:spPr>
+          <a:xfrm>
+            <a:off x="914400" y="5733288"/>
+            <a:ext cx="10972800" cy="239395"/>
+          </a:xfrm>
+          <a:prstGeom prst="rect">
+            <a:avLst/>
+          </a:prstGeom>
+          <a:noFill/>
+          <a:effectLst/>
+        </p:spPr>
+        <p:txBody>
+          <a:bodyPr wrap="none" lIns="18288" rIns="18288" tIns="18288" bIns="18288" anchor="t">
+            <a:spAutoFit/>
+          </a:bodyPr>
+          <a:lstStyle/>
+          <a:p>
+            <a:pPr algn="l">
+              <a:spcAft>
+                <a:spcPts val="0"/>
+              </a:spcAft>
+            </a:pPr>
+            <a:r>
+              <a:rPr sz="1250" b="0" i="0">
                 <a:solidFill>
                   <a:srgbClr val="B4C7D2"/>
                 </a:solidFill>
                 <a:latin typeface="Arial"/>
               </a:rPr>
-              <a:t>• N_d fabricated sites</a:t>
-            </a:r>
-          </a:p>
-        </p:txBody>
-      </p:sp>
-      <p:sp>
-        <p:nvSpPr>
-          <p:cNvPr id="23" name="C3-E01 text 21" descr="sci-ppt:o021"/>
+              <a:t>Binomial model: sites activate independently with the same probability; common heating or feedback would break that assumption.</a:t>
+            </a:r>
+          </a:p>
+        </p:txBody>
+      </p:sp>
+      <p:sp>
+        <p:nvSpPr>
+          <p:cNvPr id="65" name="C3-E01 text 63" descr="sci-ppt:o063"/>
           <p:cNvSpPr txBox="1"/>
           <p:nvPr/>
         </p:nvSpPr>
         <p:spPr>
           <a:xfrm>
-            <a:off x="6217920" y="4096512"/>
-            <a:ext cx="5715000" cy="246888"/>
+            <a:off x="320040" y="6510528"/>
+            <a:ext cx="11521440" cy="200660"/>
           </a:xfrm>
           <a:prstGeom prst="rect">
             <a:avLst/>
@@ -3824,207 +5217,7 @@
           <a:effectLst/>
         </p:spPr>
         <p:txBody>
-          <a:bodyPr wrap="square" lIns="27432" rIns="27432" tIns="18288" bIns="18288" anchor="ctr">
-            <a:spAutoFit/>
-          </a:bodyPr>
-          <a:lstStyle/>
-          <a:p>
-            <a:pPr algn="l">
-              <a:spcAft>
-                <a:spcPts val="0"/>
-              </a:spcAft>
-            </a:pPr>
-            <a:r>
-              <a:rPr sz="1150" b="0" i="0">
-                <a:solidFill>
-                  <a:srgbClr val="B4C7D2"/>
-                </a:solidFill>
-                <a:latin typeface="Arial"/>
-              </a:rPr>
-              <a:t>• N_b activated sites</a:t>
-            </a:r>
-          </a:p>
-        </p:txBody>
-      </p:sp>
-      <p:sp>
-        <p:nvSpPr>
-          <p:cNvPr id="24" name="C3-E01 text 22" descr="sci-ppt:o022"/>
-          <p:cNvSpPr txBox="1"/>
-          <p:nvPr/>
-        </p:nvSpPr>
-        <p:spPr>
-          <a:xfrm>
-            <a:off x="320040" y="4329684"/>
-            <a:ext cx="5715000" cy="246888"/>
-          </a:xfrm>
-          <a:prstGeom prst="rect">
-            <a:avLst/>
-          </a:prstGeom>
-          <a:noFill/>
-          <a:effectLst/>
-        </p:spPr>
-        <p:txBody>
-          <a:bodyPr wrap="square" lIns="27432" rIns="27432" tIns="18288" bIns="18288" anchor="ctr">
-            <a:spAutoFit/>
-          </a:bodyPr>
-          <a:lstStyle/>
-          <a:p>
-            <a:pPr algn="l">
-              <a:spcAft>
-                <a:spcPts val="0"/>
-              </a:spcAft>
-            </a:pPr>
-            <a:r>
-              <a:rPr sz="1150" b="0" i="0">
-                <a:solidFill>
-                  <a:srgbClr val="B4C7D2"/>
-                </a:solidFill>
-                <a:latin typeface="Arial"/>
-              </a:rPr>
-              <a:t>• p_a activation probability</a:t>
-            </a:r>
-          </a:p>
-        </p:txBody>
-      </p:sp>
-      <p:sp>
-        <p:nvSpPr>
-          <p:cNvPr id="25" name="C3-E01 text 23" descr="sci-ppt:o023"/>
-          <p:cNvSpPr txBox="1"/>
-          <p:nvPr/>
-        </p:nvSpPr>
-        <p:spPr>
-          <a:xfrm>
-            <a:off x="6217920" y="4329684"/>
-            <a:ext cx="5715000" cy="246888"/>
-          </a:xfrm>
-          <a:prstGeom prst="rect">
-            <a:avLst/>
-          </a:prstGeom>
-          <a:noFill/>
-          <a:effectLst/>
-        </p:spPr>
-        <p:txBody>
-          <a:bodyPr wrap="square" lIns="27432" rIns="27432" tIns="18288" bIns="18288" anchor="ctr">
-            <a:spAutoFit/>
-          </a:bodyPr>
-          <a:lstStyle/>
-          <a:p>
-            <a:pPr algn="l">
-              <a:spcAft>
-                <a:spcPts val="0"/>
-              </a:spcAft>
-            </a:pPr>
-            <a:r>
-              <a:rPr sz="1150" b="0" i="0">
-                <a:solidFill>
-                  <a:srgbClr val="B4C7D2"/>
-                </a:solidFill>
-                <a:latin typeface="Arial"/>
-              </a:rPr>
-              <a:t>• E[N_b], Var, CV, Pr: count statistics</a:t>
-            </a:r>
-          </a:p>
-        </p:txBody>
-      </p:sp>
-      <p:sp>
-        <p:nvSpPr>
-          <p:cNvPr id="26" name="C3-E01 text 24" descr="sci-ppt:o024"/>
-          <p:cNvSpPr txBox="1"/>
-          <p:nvPr/>
-        </p:nvSpPr>
-        <p:spPr>
-          <a:xfrm>
-            <a:off x="320040" y="5596128"/>
-            <a:ext cx="11430000" cy="292608"/>
-          </a:xfrm>
-          <a:prstGeom prst="rect">
-            <a:avLst/>
-          </a:prstGeom>
-          <a:noFill/>
-          <a:effectLst/>
-        </p:spPr>
-        <p:txBody>
-          <a:bodyPr wrap="square" lIns="27432" rIns="27432" tIns="18288" bIns="18288" anchor="ctr">
-            <a:spAutoFit/>
-          </a:bodyPr>
-          <a:lstStyle/>
-          <a:p>
-            <a:pPr algn="l">
-              <a:spcAft>
-                <a:spcPts val="0"/>
-              </a:spcAft>
-            </a:pPr>
-            <a:r>
-              <a:rPr sz="1150" b="0" i="0">
-                <a:solidFill>
-                  <a:srgbClr val="8EDBD4"/>
-                </a:solidFill>
-                <a:latin typeface="Arial"/>
-              </a:rPr>
-              <a:t>Missing sites change symmetry and timing</a:t>
-            </a:r>
-          </a:p>
-        </p:txBody>
-      </p:sp>
-      <p:sp>
-        <p:nvSpPr>
-          <p:cNvPr id="27" name="C3-E01 text 25" descr="sci-ppt:o025"/>
-          <p:cNvSpPr txBox="1"/>
-          <p:nvPr/>
-        </p:nvSpPr>
-        <p:spPr>
-          <a:xfrm>
-            <a:off x="320040" y="5870448"/>
-            <a:ext cx="11430000" cy="292608"/>
-          </a:xfrm>
-          <a:prstGeom prst="rect">
-            <a:avLst/>
-          </a:prstGeom>
-          <a:noFill/>
-          <a:effectLst/>
-        </p:spPr>
-        <p:txBody>
-          <a:bodyPr wrap="square" lIns="27432" rIns="27432" tIns="18288" bIns="18288" anchor="ctr">
-            <a:spAutoFit/>
-          </a:bodyPr>
-          <a:lstStyle/>
-          <a:p>
-            <a:pPr algn="l">
-              <a:spcAft>
-                <a:spcPts val="0"/>
-              </a:spcAft>
-            </a:pPr>
-            <a:r>
-              <a:rPr sz="1150" b="0" i="0">
-                <a:solidFill>
-                  <a:srgbClr val="8EDBD4"/>
-                </a:solidFill>
-                <a:latin typeface="Arial"/>
-              </a:rPr>
-              <a:t>Independent activation is an assumption</a:t>
-            </a:r>
-          </a:p>
-        </p:txBody>
-      </p:sp>
-      <p:sp>
-        <p:nvSpPr>
-          <p:cNvPr id="28" name="C3-E01 text 26" descr="sci-ppt:o026"/>
-          <p:cNvSpPr txBox="1"/>
-          <p:nvPr/>
-        </p:nvSpPr>
-        <p:spPr>
-          <a:xfrm>
-            <a:off x="320040" y="6473952"/>
-            <a:ext cx="11430000" cy="256032"/>
-          </a:xfrm>
-          <a:prstGeom prst="rect">
-            <a:avLst/>
-          </a:prstGeom>
-          <a:noFill/>
-          <a:effectLst/>
-        </p:spPr>
-        <p:txBody>
-          <a:bodyPr wrap="square" lIns="27432" rIns="27432" tIns="18288" bIns="18288" anchor="ctr">
+          <a:bodyPr wrap="none" lIns="18288" rIns="18288" tIns="18288" bIns="18288" anchor="t">
             <a:spAutoFit/>
           </a:bodyPr>
           <a:lstStyle/>
@@ -4041,7 +5234,7 @@
                 </a:solidFill>
                 <a:latin typeface="Arial"/>
               </a:rPr>
-              <a:t>Model schematic; geometry is not to scale.</a:t>
+              <a:t>Statistics of Eq. C3-E01 (exact binomial distribution).</a:t>
             </a:r>
           </a:p>
         </p:txBody>
